--- a/Modul Minna 2/Bab 27/27. Minna 2 Tata Bahasa Bab 27 - Slide.pptx
+++ b/Modul Minna 2/Bab 27/27. Minna 2 Tata Bahasa Bab 27 - Slide.pptx
@@ -2922,7 +2922,7 @@
                 <a:ea typeface="Arial" pitchFamily="34" charset="-122"/>
                 <a:cs typeface="Arial" pitchFamily="34" charset="-120"/>
               </a:rPr>
-              <a:t>Sdr. Andi bisa berbahasa Jepang.</a:t>
+              <a:t>Andi bisa berbahasa Jepang.</a:t>
             </a:r>
             <a:endParaRPr lang="en-US" sz="950" dirty="0"/>
           </a:p>
@@ -3469,7 +3469,7 @@
                 <a:ea typeface="Arial" pitchFamily="34" charset="-122"/>
                 <a:cs typeface="Arial" pitchFamily="34" charset="-120"/>
               </a:rPr>
-              <a:t>しんかんせんからふじさんがみえます。</a:t>
+              <a:t>しんかんせんからブロモさんがみえます。</a:t>
             </a:r>
             <a:endParaRPr lang="en-US" sz="1700" dirty="0"/>
           </a:p>
@@ -3508,7 +3508,7 @@
                 <a:ea typeface="Arial" pitchFamily="34" charset="-122"/>
                 <a:cs typeface="Arial" pitchFamily="34" charset="-120"/>
               </a:rPr>
-              <a:t>shinkansen kara Fuji-san ga miemasu</a:t>
+              <a:t>shinkansen kara Buromo-san ga miemasu</a:t>
             </a:r>
             <a:pPr indent="0" marL="0">
               <a:buNone/>
@@ -3536,7 +3536,7 @@
                 <a:ea typeface="Arial" pitchFamily="34" charset="-122"/>
                 <a:cs typeface="Arial" pitchFamily="34" charset="-120"/>
               </a:rPr>
-              <a:t>Dari Shinkansen terlihat Gunung Fuji.</a:t>
+              <a:t>Dari kereta cepat terlihat Gunung Bromo.</a:t>
             </a:r>
             <a:endParaRPr lang="en-US" sz="950" dirty="0"/>
           </a:p>
